--- a/activity/M04A05/M04A05.pptx
+++ b/activity/M04A05/M04A05.pptx
@@ -844,7 +844,7 @@
             <a:fld id="{53CE91DE-ABC6-4D22-89A0-1765B629FB43}" type="datetimeFigureOut">
               <a:rPr lang="es-CO" smtClean="0"/>
               <a:pPr/>
-              <a:t>6/08/2025</a:t>
+              <a:t>21/11/2025</a:t>
             </a:fld>
             <a:endParaRPr lang="es-CO"/>
           </a:p>
@@ -3592,7 +3592,7 @@
             <a:fld id="{43DF08CB-A55A-40B1-AEFD-F19B3CFD19B5}" type="datetimeFigureOut">
               <a:rPr lang="es-CO" smtClean="0"/>
               <a:pPr/>
-              <a:t>6/08/2025</a:t>
+              <a:t>21/11/2025</a:t>
             </a:fld>
             <a:endParaRPr lang="es-CO"/>
           </a:p>
@@ -3759,7 +3759,7 @@
             <a:fld id="{43DF08CB-A55A-40B1-AEFD-F19B3CFD19B5}" type="datetimeFigureOut">
               <a:rPr lang="es-CO" smtClean="0"/>
               <a:pPr/>
-              <a:t>6/08/2025</a:t>
+              <a:t>21/11/2025</a:t>
             </a:fld>
             <a:endParaRPr lang="es-CO"/>
           </a:p>
@@ -3936,7 +3936,7 @@
             <a:fld id="{43DF08CB-A55A-40B1-AEFD-F19B3CFD19B5}" type="datetimeFigureOut">
               <a:rPr lang="es-CO" smtClean="0"/>
               <a:pPr/>
-              <a:t>6/08/2025</a:t>
+              <a:t>21/11/2025</a:t>
             </a:fld>
             <a:endParaRPr lang="es-CO"/>
           </a:p>
@@ -4103,7 +4103,7 @@
             <a:fld id="{43DF08CB-A55A-40B1-AEFD-F19B3CFD19B5}" type="datetimeFigureOut">
               <a:rPr lang="es-CO" smtClean="0"/>
               <a:pPr/>
-              <a:t>6/08/2025</a:t>
+              <a:t>21/11/2025</a:t>
             </a:fld>
             <a:endParaRPr lang="es-CO"/>
           </a:p>
@@ -4346,7 +4346,7 @@
             <a:fld id="{43DF08CB-A55A-40B1-AEFD-F19B3CFD19B5}" type="datetimeFigureOut">
               <a:rPr lang="es-CO" smtClean="0"/>
               <a:pPr/>
-              <a:t>6/08/2025</a:t>
+              <a:t>21/11/2025</a:t>
             </a:fld>
             <a:endParaRPr lang="es-CO"/>
           </a:p>
@@ -4631,7 +4631,7 @@
             <a:fld id="{43DF08CB-A55A-40B1-AEFD-F19B3CFD19B5}" type="datetimeFigureOut">
               <a:rPr lang="es-CO" smtClean="0"/>
               <a:pPr/>
-              <a:t>6/08/2025</a:t>
+              <a:t>21/11/2025</a:t>
             </a:fld>
             <a:endParaRPr lang="es-CO"/>
           </a:p>
@@ -5050,7 +5050,7 @@
             <a:fld id="{43DF08CB-A55A-40B1-AEFD-F19B3CFD19B5}" type="datetimeFigureOut">
               <a:rPr lang="es-CO" smtClean="0"/>
               <a:pPr/>
-              <a:t>6/08/2025</a:t>
+              <a:t>21/11/2025</a:t>
             </a:fld>
             <a:endParaRPr lang="es-CO"/>
           </a:p>
@@ -5165,7 +5165,7 @@
             <a:fld id="{43DF08CB-A55A-40B1-AEFD-F19B3CFD19B5}" type="datetimeFigureOut">
               <a:rPr lang="es-CO" smtClean="0"/>
               <a:pPr/>
-              <a:t>6/08/2025</a:t>
+              <a:t>21/11/2025</a:t>
             </a:fld>
             <a:endParaRPr lang="es-CO"/>
           </a:p>
@@ -5257,7 +5257,7 @@
             <a:fld id="{43DF08CB-A55A-40B1-AEFD-F19B3CFD19B5}" type="datetimeFigureOut">
               <a:rPr lang="es-CO" smtClean="0"/>
               <a:pPr/>
-              <a:t>6/08/2025</a:t>
+              <a:t>21/11/2025</a:t>
             </a:fld>
             <a:endParaRPr lang="es-CO"/>
           </a:p>
@@ -5531,7 +5531,7 @@
             <a:fld id="{43DF08CB-A55A-40B1-AEFD-F19B3CFD19B5}" type="datetimeFigureOut">
               <a:rPr lang="es-CO" smtClean="0"/>
               <a:pPr/>
-              <a:t>6/08/2025</a:t>
+              <a:t>21/11/2025</a:t>
             </a:fld>
             <a:endParaRPr lang="es-CO"/>
           </a:p>
@@ -5781,7 +5781,7 @@
             <a:fld id="{43DF08CB-A55A-40B1-AEFD-F19B3CFD19B5}" type="datetimeFigureOut">
               <a:rPr lang="es-CO" smtClean="0"/>
               <a:pPr/>
-              <a:t>6/08/2025</a:t>
+              <a:t>21/11/2025</a:t>
             </a:fld>
             <a:endParaRPr lang="es-CO"/>
           </a:p>
@@ -5994,7 +5994,7 @@
             <a:fld id="{43DF08CB-A55A-40B1-AEFD-F19B3CFD19B5}" type="datetimeFigureOut">
               <a:rPr lang="es-CO" smtClean="0"/>
               <a:pPr/>
-              <a:t>6/08/2025</a:t>
+              <a:t>21/11/2025</a:t>
             </a:fld>
             <a:endParaRPr lang="es-CO"/>
           </a:p>
